--- a/prezentacie/t03w.pptx
+++ b/prezentacie/t03w.pptx
@@ -248,7 +248,7 @@
           <a:p>
             <a:fld id="{10052495-8BC8-4CFB-94B1-B0429F101A0D}" type="datetimeFigureOut">
               <a:rPr lang="sk-SK" smtClean="0"/>
-              <a:t>13. 9. 2025</a:t>
+              <a:t>15. 9. 2026</a:t>
             </a:fld>
             <a:endParaRPr lang="sk-SK"/>
           </a:p>
@@ -418,7 +418,7 @@
           <a:p>
             <a:fld id="{10052495-8BC8-4CFB-94B1-B0429F101A0D}" type="datetimeFigureOut">
               <a:rPr lang="sk-SK" smtClean="0"/>
-              <a:t>13. 9. 2025</a:t>
+              <a:t>15. 9. 2026</a:t>
             </a:fld>
             <a:endParaRPr lang="sk-SK"/>
           </a:p>
@@ -598,7 +598,7 @@
           <a:p>
             <a:fld id="{10052495-8BC8-4CFB-94B1-B0429F101A0D}" type="datetimeFigureOut">
               <a:rPr lang="sk-SK" smtClean="0"/>
-              <a:t>13. 9. 2025</a:t>
+              <a:t>15. 9. 2026</a:t>
             </a:fld>
             <a:endParaRPr lang="sk-SK"/>
           </a:p>
@@ -768,7 +768,7 @@
           <a:p>
             <a:fld id="{10052495-8BC8-4CFB-94B1-B0429F101A0D}" type="datetimeFigureOut">
               <a:rPr lang="sk-SK" smtClean="0"/>
-              <a:t>13. 9. 2025</a:t>
+              <a:t>15. 9. 2026</a:t>
             </a:fld>
             <a:endParaRPr lang="sk-SK"/>
           </a:p>
@@ -1014,7 +1014,7 @@
           <a:p>
             <a:fld id="{10052495-8BC8-4CFB-94B1-B0429F101A0D}" type="datetimeFigureOut">
               <a:rPr lang="sk-SK" smtClean="0"/>
-              <a:t>13. 9. 2025</a:t>
+              <a:t>15. 9. 2026</a:t>
             </a:fld>
             <a:endParaRPr lang="sk-SK"/>
           </a:p>
@@ -1246,7 +1246,7 @@
           <a:p>
             <a:fld id="{10052495-8BC8-4CFB-94B1-B0429F101A0D}" type="datetimeFigureOut">
               <a:rPr lang="sk-SK" smtClean="0"/>
-              <a:t>13. 9. 2025</a:t>
+              <a:t>15. 9. 2026</a:t>
             </a:fld>
             <a:endParaRPr lang="sk-SK"/>
           </a:p>
@@ -1613,7 +1613,7 @@
           <a:p>
             <a:fld id="{10052495-8BC8-4CFB-94B1-B0429F101A0D}" type="datetimeFigureOut">
               <a:rPr lang="sk-SK" smtClean="0"/>
-              <a:t>13. 9. 2025</a:t>
+              <a:t>15. 9. 2026</a:t>
             </a:fld>
             <a:endParaRPr lang="sk-SK"/>
           </a:p>
@@ -1731,7 +1731,7 @@
           <a:p>
             <a:fld id="{10052495-8BC8-4CFB-94B1-B0429F101A0D}" type="datetimeFigureOut">
               <a:rPr lang="sk-SK" smtClean="0"/>
-              <a:t>13. 9. 2025</a:t>
+              <a:t>15. 9. 2026</a:t>
             </a:fld>
             <a:endParaRPr lang="sk-SK"/>
           </a:p>
@@ -1826,7 +1826,7 @@
           <a:p>
             <a:fld id="{10052495-8BC8-4CFB-94B1-B0429F101A0D}" type="datetimeFigureOut">
               <a:rPr lang="sk-SK" smtClean="0"/>
-              <a:t>13. 9. 2025</a:t>
+              <a:t>15. 9. 2026</a:t>
             </a:fld>
             <a:endParaRPr lang="sk-SK"/>
           </a:p>
@@ -2103,7 +2103,7 @@
           <a:p>
             <a:fld id="{10052495-8BC8-4CFB-94B1-B0429F101A0D}" type="datetimeFigureOut">
               <a:rPr lang="sk-SK" smtClean="0"/>
-              <a:t>13. 9. 2025</a:t>
+              <a:t>15. 9. 2026</a:t>
             </a:fld>
             <a:endParaRPr lang="sk-SK"/>
           </a:p>
@@ -2360,7 +2360,7 @@
           <a:p>
             <a:fld id="{10052495-8BC8-4CFB-94B1-B0429F101A0D}" type="datetimeFigureOut">
               <a:rPr lang="sk-SK" smtClean="0"/>
-              <a:t>13. 9. 2025</a:t>
+              <a:t>15. 9. 2026</a:t>
             </a:fld>
             <a:endParaRPr lang="sk-SK"/>
           </a:p>
@@ -2573,7 +2573,7 @@
           <a:p>
             <a:fld id="{10052495-8BC8-4CFB-94B1-B0429F101A0D}" type="datetimeFigureOut">
               <a:rPr lang="sk-SK" smtClean="0"/>
-              <a:t>13. 9. 2025</a:t>
+              <a:t>15. 9. 2026</a:t>
             </a:fld>
             <a:endParaRPr lang="sk-SK"/>
           </a:p>
@@ -3499,7 +3499,15 @@
             </a:br>
             <a:r>
               <a:rPr lang="sk-SK" b="1" dirty="0"/>
-              <a:t>Ing. Jozef Wagner PhD.</a:t>
+              <a:t>Ing. Jozef Wagner</a:t>
+            </a:r>
+            <a:r>
+              <a:rPr lang="en-US" b="1" dirty="0"/>
+              <a:t>,</a:t>
+            </a:r>
+            <a:r>
+              <a:rPr lang="sk-SK" b="1" dirty="0"/>
+              <a:t> PhD.</a:t>
             </a:r>
           </a:p>
           <a:p>
@@ -4181,7 +4189,14 @@
           <a:lstStyle/>
           <a:p>
             <a:r>
-              <a:rPr lang="sk-SK" sz="4000" dirty="0"/>
+              <a:rPr lang="sk-SK" sz="4000" dirty="0">
+                <a:solidFill>
+                  <a:srgbClr val="C00000"/>
+                </a:solidFill>
+                <a:highlight>
+                  <a:srgbClr val="00FFFF"/>
+                </a:highlight>
+              </a:rPr>
               <a:t>Identita</a:t>
             </a:r>
           </a:p>
@@ -4222,7 +4237,14 @@
               <a:buNone/>
             </a:pPr>
             <a:r>
-              <a:rPr lang="sk-SK" dirty="0"/>
+              <a:rPr lang="sk-SK" dirty="0">
+                <a:solidFill>
+                  <a:srgbClr val="C00000"/>
+                </a:solidFill>
+                <a:highlight>
+                  <a:srgbClr val="00FFFF"/>
+                </a:highlight>
+              </a:rPr>
               <a:t>Identita reprezentuje jedinečnosť danej veci.</a:t>
             </a:r>
           </a:p>
@@ -4234,7 +4256,14 @@
               <a:buNone/>
             </a:pPr>
             <a:r>
-              <a:rPr lang="sk-SK" dirty="0"/>
+              <a:rPr lang="sk-SK" dirty="0">
+                <a:solidFill>
+                  <a:srgbClr val="C00000"/>
+                </a:solidFill>
+                <a:highlight>
+                  <a:srgbClr val="00FFFF"/>
+                </a:highlight>
+              </a:rPr>
               <a:t>Hodnota/vlastnosť veci sa meniť môže, identita ostáva</a:t>
             </a:r>
           </a:p>
@@ -4245,7 +4274,14 @@
               </a:spcBef>
               <a:buNone/>
             </a:pPr>
-            <a:endParaRPr lang="sk-SK" sz="2800" dirty="0"/>
+            <a:endParaRPr lang="sk-SK" sz="2800" dirty="0">
+              <a:solidFill>
+                <a:srgbClr val="C00000"/>
+              </a:solidFill>
+              <a:highlight>
+                <a:srgbClr val="00FFFF"/>
+              </a:highlight>
+            </a:endParaRPr>
           </a:p>
           <a:p>
             <a:pPr marL="0" indent="0">
@@ -4255,19 +4291,47 @@
               <a:buNone/>
             </a:pPr>
             <a:r>
-              <a:rPr lang="sk-SK" dirty="0"/>
+              <a:rPr lang="sk-SK" dirty="0">
+                <a:solidFill>
+                  <a:srgbClr val="C00000"/>
+                </a:solidFill>
+                <a:highlight>
+                  <a:srgbClr val="00FFFF"/>
+                </a:highlight>
+              </a:rPr>
               <a:t>P</a:t>
             </a:r>
             <a:r>
-              <a:rPr lang="sk-SK" sz="2800" dirty="0"/>
+              <a:rPr lang="sk-SK" sz="2800" dirty="0">
+                <a:solidFill>
+                  <a:srgbClr val="C00000"/>
+                </a:solidFill>
+                <a:highlight>
+                  <a:srgbClr val="00FFFF"/>
+                </a:highlight>
+              </a:rPr>
               <a:t>rimitívne </a:t>
             </a:r>
             <a:r>
-              <a:rPr lang="sk-SK" sz="2800" dirty="0" err="1"/>
+              <a:rPr lang="sk-SK" sz="2800" dirty="0" err="1">
+                <a:solidFill>
+                  <a:srgbClr val="C00000"/>
+                </a:solidFill>
+                <a:highlight>
+                  <a:srgbClr val="00FFFF"/>
+                </a:highlight>
+              </a:rPr>
               <a:t>dátové</a:t>
             </a:r>
             <a:r>
-              <a:rPr lang="sk-SK" sz="2800" dirty="0"/>
+              <a:rPr lang="sk-SK" sz="2800" dirty="0">
+                <a:solidFill>
+                  <a:srgbClr val="C00000"/>
+                </a:solidFill>
+                <a:highlight>
+                  <a:srgbClr val="00FFFF"/>
+                </a:highlight>
+              </a:rPr>
               <a:t> typy v Jave majú hodnoty bez identity.</a:t>
             </a:r>
           </a:p>
@@ -4341,10 +4405,24 @@
           <a:lstStyle/>
           <a:p>
             <a:r>
-              <a:rPr lang="sk-SK" dirty="0"/>
+              <a:rPr lang="sk-SK" dirty="0">
+                <a:solidFill>
+                  <a:srgbClr val="C00000"/>
+                </a:solidFill>
+                <a:highlight>
+                  <a:srgbClr val="00FFFF"/>
+                </a:highlight>
+              </a:rPr>
               <a:t>Objekt</a:t>
             </a:r>
-            <a:endParaRPr lang="sk-SK" sz="4000" dirty="0"/>
+            <a:endParaRPr lang="sk-SK" sz="4000" dirty="0">
+              <a:solidFill>
+                <a:srgbClr val="C00000"/>
+              </a:solidFill>
+              <a:highlight>
+                <a:srgbClr val="00FFFF"/>
+              </a:highlight>
+            </a:endParaRPr>
           </a:p>
         </p:txBody>
       </p:sp>
@@ -4377,42 +4455,147 @@
           <a:lstStyle/>
           <a:p>
             <a:r>
-              <a:rPr lang="sk-SK" b="1" dirty="0"/>
+              <a:rPr lang="sk-SK" b="1" dirty="0">
+                <a:solidFill>
+                  <a:srgbClr val="C00000"/>
+                </a:solidFill>
+                <a:highlight>
+                  <a:srgbClr val="00FFFF"/>
+                </a:highlight>
+              </a:rPr>
               <a:t>má svoju identitu</a:t>
             </a:r>
             <a:r>
+              <a:rPr lang="sk-SK" dirty="0">
+                <a:solidFill>
+                  <a:srgbClr val="C00000"/>
+                </a:solidFill>
+                <a:highlight>
+                  <a:srgbClr val="00FFFF"/>
+                </a:highlight>
+              </a:rPr>
+              <a:t> </a:t>
+            </a:r>
+            <a:r>
               <a:rPr lang="sk-SK" dirty="0"/>
-              <a:t> - je jedinečná entita</a:t>
-            </a:r>
-          </a:p>
-          <a:p>
-            <a:r>
-              <a:rPr lang="sk-SK" b="1" dirty="0"/>
+              <a:t>- je jedinečná entita</a:t>
+            </a:r>
+          </a:p>
+          <a:p>
+            <a:r>
+              <a:rPr lang="sk-SK" b="1" dirty="0">
+                <a:solidFill>
+                  <a:srgbClr val="C00000"/>
+                </a:solidFill>
+                <a:highlight>
+                  <a:srgbClr val="00FFFF"/>
+                </a:highlight>
+              </a:rPr>
               <a:t>nesie stav</a:t>
             </a:r>
             <a:r>
+              <a:rPr lang="sk-SK" dirty="0">
+                <a:solidFill>
+                  <a:srgbClr val="C00000"/>
+                </a:solidFill>
+                <a:highlight>
+                  <a:srgbClr val="00FFFF"/>
+                </a:highlight>
+              </a:rPr>
+              <a:t> </a:t>
+            </a:r>
+            <a:r>
+              <a:rPr lang="en-US" dirty="0">
+                <a:solidFill>
+                  <a:srgbClr val="C00000"/>
+                </a:solidFill>
+                <a:highlight>
+                  <a:srgbClr val="00FFFF"/>
+                </a:highlight>
+              </a:rPr>
+              <a:t>- </a:t>
+            </a:r>
+            <a:r>
+              <a:rPr lang="en-US" dirty="0" err="1">
+                <a:solidFill>
+                  <a:srgbClr val="C00000"/>
+                </a:solidFill>
+                <a:highlight>
+                  <a:srgbClr val="00FFFF"/>
+                </a:highlight>
+              </a:rPr>
+              <a:t>atrib</a:t>
+            </a:r>
+            <a:r>
+              <a:rPr lang="sk-SK" dirty="0" err="1">
+                <a:solidFill>
+                  <a:srgbClr val="C00000"/>
+                </a:solidFill>
+                <a:highlight>
+                  <a:srgbClr val="00FFFF"/>
+                </a:highlight>
+              </a:rPr>
+              <a:t>úty</a:t>
+            </a:r>
+            <a:r>
               <a:rPr lang="sk-SK" dirty="0"/>
-              <a:t> - má svoje konkrétne hodnoty - atribúty</a:t>
-            </a:r>
-          </a:p>
-          <a:p>
-            <a:r>
-              <a:rPr lang="sk-SK" b="1" dirty="0"/>
+              <a:t> - má svoje konkrétne hodnoty </a:t>
+            </a:r>
+          </a:p>
+          <a:p>
+            <a:r>
+              <a:rPr lang="sk-SK" b="1" dirty="0">
+                <a:solidFill>
+                  <a:srgbClr val="C00000"/>
+                </a:solidFill>
+                <a:highlight>
+                  <a:srgbClr val="00FFFF"/>
+                </a:highlight>
+              </a:rPr>
               <a:t>poskytuje správanie</a:t>
             </a:r>
             <a:r>
+              <a:rPr lang="sk-SK" dirty="0">
+                <a:solidFill>
+                  <a:srgbClr val="C00000"/>
+                </a:solidFill>
+                <a:highlight>
+                  <a:srgbClr val="00FFFF"/>
+                </a:highlight>
+              </a:rPr>
+              <a:t> - metódy</a:t>
+            </a:r>
+            <a:r>
               <a:rPr lang="sk-SK" dirty="0"/>
-              <a:t> - poskytuje metódy, ktoré môžeme nad objektom volať</a:t>
-            </a:r>
-          </a:p>
-          <a:p>
-            <a:r>
-              <a:rPr lang="sk-SK" b="1" dirty="0"/>
+              <a:t> - poskytuje metódy, ktoré môžeme nad objektom volať</a:t>
+            </a:r>
+          </a:p>
+          <a:p>
+            <a:r>
+              <a:rPr lang="sk-SK" b="1" dirty="0">
+                <a:solidFill>
+                  <a:srgbClr val="C00000"/>
+                </a:solidFill>
+                <a:highlight>
+                  <a:srgbClr val="00FFFF"/>
+                </a:highlight>
+              </a:rPr>
               <a:t>je inštanciou triedy</a:t>
             </a:r>
             <a:r>
+              <a:rPr lang="sk-SK" dirty="0">
+                <a:solidFill>
+                  <a:srgbClr val="C00000"/>
+                </a:solidFill>
+                <a:highlight>
+                  <a:srgbClr val="00FFFF"/>
+                </a:highlight>
+              </a:rPr>
+              <a:t> </a:t>
+            </a:r>
+            <a:r>
               <a:rPr lang="sk-SK" dirty="0"/>
-              <a:t> - je konkrétnym výtvorom z abstraktného návrhu triedy</a:t>
+              <a:t>- je konkrétnym výtvorom z abstraktného návrhu triedy</a:t>
             </a:r>
           </a:p>
         </p:txBody>
@@ -4521,11 +4704,21 @@
           <a:lstStyle/>
           <a:p>
             <a:r>
-              <a:rPr lang="sk-SK" dirty="0"/>
+              <a:rPr lang="sk-SK" dirty="0">
+                <a:solidFill>
+                  <a:srgbClr val="C00000"/>
+                </a:solidFill>
+                <a:highlight>
+                  <a:srgbClr val="00FFFF"/>
+                </a:highlight>
+              </a:rPr>
               <a:t>Nové objekty vytvárame pomocou operátora </a:t>
             </a:r>
             <a:r>
               <a:rPr lang="sk-SK" dirty="0">
+                <a:solidFill>
+                  <a:srgbClr val="C00000"/>
+                </a:solidFill>
                 <a:highlight>
                   <a:srgbClr val="FFFF00"/>
                 </a:highlight>
@@ -4537,6 +4730,9 @@
           <a:p>
             <a:r>
               <a:rPr lang="sk-SK" dirty="0">
+                <a:solidFill>
+                  <a:srgbClr val="C00000"/>
+                </a:solidFill>
                 <a:highlight>
                   <a:srgbClr val="FFFF00"/>
                 </a:highlight>
@@ -4545,13 +4741,23 @@
               <a:t>==</a:t>
             </a:r>
             <a:r>
-              <a:rPr lang="sk-SK" dirty="0"/>
+              <a:rPr lang="sk-SK" dirty="0">
+                <a:solidFill>
+                  <a:srgbClr val="C00000"/>
+                </a:solidFill>
+                <a:highlight>
+                  <a:srgbClr val="00FFFF"/>
+                </a:highlight>
+              </a:rPr>
               <a:t> porovnáva objekty podľa identity, primitívne typy podľa hodnoty</a:t>
             </a:r>
           </a:p>
           <a:p>
             <a:r>
               <a:rPr lang="sk-SK" dirty="0" err="1">
+                <a:solidFill>
+                  <a:srgbClr val="C00000"/>
+                </a:solidFill>
                 <a:highlight>
                   <a:srgbClr val="FFFF00"/>
                 </a:highlight>
@@ -4561,6 +4767,9 @@
             </a:r>
             <a:r>
               <a:rPr lang="sk-SK" dirty="0">
+                <a:solidFill>
+                  <a:srgbClr val="C00000"/>
+                </a:solidFill>
                 <a:highlight>
                   <a:srgbClr val="FFFF00"/>
                 </a:highlight>
@@ -4569,7 +4778,14 @@
               <a:t>()</a:t>
             </a:r>
             <a:r>
-              <a:rPr lang="sk-SK" dirty="0"/>
+              <a:rPr lang="sk-SK" dirty="0">
+                <a:solidFill>
+                  <a:srgbClr val="C00000"/>
+                </a:solidFill>
+                <a:highlight>
+                  <a:srgbClr val="00FFFF"/>
+                </a:highlight>
+              </a:rPr>
               <a:t> porovnáva objekty podľa hodnoty</a:t>
             </a:r>
           </a:p>
@@ -4643,10 +4859,24 @@
           <a:lstStyle/>
           <a:p>
             <a:r>
-              <a:rPr lang="sk-SK" dirty="0"/>
+              <a:rPr lang="sk-SK" dirty="0">
+                <a:solidFill>
+                  <a:srgbClr val="C00000"/>
+                </a:solidFill>
+                <a:highlight>
+                  <a:srgbClr val="00FFFF"/>
+                </a:highlight>
+              </a:rPr>
               <a:t>Príkazy a výrazy</a:t>
             </a:r>
-            <a:endParaRPr lang="sk-SK" sz="4000" dirty="0"/>
+            <a:endParaRPr lang="sk-SK" sz="4000" dirty="0">
+              <a:solidFill>
+                <a:srgbClr val="C00000"/>
+              </a:solidFill>
+              <a:highlight>
+                <a:srgbClr val="00FFFF"/>
+              </a:highlight>
+            </a:endParaRPr>
           </a:p>
         </p:txBody>
       </p:sp>
@@ -4679,60 +4909,151 @@
           <a:lstStyle/>
           <a:p>
             <a:r>
-              <a:rPr lang="sk-SK" dirty="0"/>
+              <a:rPr lang="sk-SK" b="1" dirty="0">
+                <a:solidFill>
+                  <a:srgbClr val="C00000"/>
+                </a:solidFill>
+                <a:highlight>
+                  <a:srgbClr val="00FFFF"/>
+                </a:highlight>
+              </a:rPr>
               <a:t>Výraz </a:t>
             </a:r>
             <a:r>
-              <a:rPr lang="sk-SK" i="1" dirty="0"/>
+              <a:rPr lang="sk-SK" b="1" i="1" dirty="0">
+                <a:solidFill>
+                  <a:srgbClr val="C00000"/>
+                </a:solidFill>
+                <a:highlight>
+                  <a:srgbClr val="00FFFF"/>
+                </a:highlight>
+              </a:rPr>
               <a:t>(</a:t>
             </a:r>
             <a:r>
-              <a:rPr lang="sk-SK" i="1" dirty="0" err="1"/>
+              <a:rPr lang="sk-SK" b="1" i="1" dirty="0" err="1">
+                <a:solidFill>
+                  <a:srgbClr val="C00000"/>
+                </a:solidFill>
+                <a:highlight>
+                  <a:srgbClr val="00FFFF"/>
+                </a:highlight>
+              </a:rPr>
               <a:t>expression</a:t>
             </a:r>
             <a:r>
-              <a:rPr lang="sk-SK" i="1" dirty="0"/>
+              <a:rPr lang="sk-SK" b="1" i="1" dirty="0">
+                <a:solidFill>
+                  <a:srgbClr val="C00000"/>
+                </a:solidFill>
+                <a:highlight>
+                  <a:srgbClr val="00FFFF"/>
+                </a:highlight>
+              </a:rPr>
               <a:t>) </a:t>
             </a:r>
             <a:r>
-              <a:rPr lang="sk-SK" dirty="0"/>
+              <a:rPr lang="sk-SK" dirty="0">
+                <a:solidFill>
+                  <a:srgbClr val="C00000"/>
+                </a:solidFill>
+                <a:highlight>
+                  <a:srgbClr val="00FFFF"/>
+                </a:highlight>
+              </a:rPr>
               <a:t>po vyhodnotení vráti hodnotu</a:t>
             </a:r>
           </a:p>
           <a:p>
             <a:r>
-              <a:rPr lang="sk-SK" dirty="0"/>
+              <a:rPr lang="sk-SK" dirty="0">
+                <a:solidFill>
+                  <a:srgbClr val="C00000"/>
+                </a:solidFill>
+                <a:highlight>
+                  <a:srgbClr val="00FFFF"/>
+                </a:highlight>
+              </a:rPr>
               <a:t>Výrazy môžu byť súčasťou príkazov</a:t>
             </a:r>
           </a:p>
           <a:p>
-            <a:endParaRPr lang="sk-SK" dirty="0"/>
-          </a:p>
-          <a:p>
-            <a:r>
-              <a:rPr lang="sk-SK" dirty="0"/>
+            <a:endParaRPr lang="sk-SK" dirty="0">
+              <a:solidFill>
+                <a:srgbClr val="C00000"/>
+              </a:solidFill>
+              <a:highlight>
+                <a:srgbClr val="00FFFF"/>
+              </a:highlight>
+            </a:endParaRPr>
+          </a:p>
+          <a:p>
+            <a:r>
+              <a:rPr lang="sk-SK" b="1" dirty="0">
+                <a:solidFill>
+                  <a:srgbClr val="C00000"/>
+                </a:solidFill>
+                <a:highlight>
+                  <a:srgbClr val="00FFFF"/>
+                </a:highlight>
+              </a:rPr>
               <a:t>Príkaz </a:t>
             </a:r>
             <a:r>
-              <a:rPr lang="sk-SK" i="1" dirty="0"/>
+              <a:rPr lang="sk-SK" b="1" i="1" dirty="0">
+                <a:solidFill>
+                  <a:srgbClr val="C00000"/>
+                </a:solidFill>
+                <a:highlight>
+                  <a:srgbClr val="00FFFF"/>
+                </a:highlight>
+              </a:rPr>
               <a:t>(</a:t>
             </a:r>
             <a:r>
-              <a:rPr lang="sk-SK" i="1" dirty="0" err="1"/>
+              <a:rPr lang="sk-SK" b="1" i="1" dirty="0" err="1">
+                <a:solidFill>
+                  <a:srgbClr val="C00000"/>
+                </a:solidFill>
+                <a:highlight>
+                  <a:srgbClr val="00FFFF"/>
+                </a:highlight>
+              </a:rPr>
               <a:t>statement</a:t>
             </a:r>
             <a:r>
-              <a:rPr lang="sk-SK" i="1" dirty="0"/>
+              <a:rPr lang="sk-SK" b="1" i="1" dirty="0">
+                <a:solidFill>
+                  <a:srgbClr val="C00000"/>
+                </a:solidFill>
+                <a:highlight>
+                  <a:srgbClr val="00FFFF"/>
+                </a:highlight>
+              </a:rPr>
               <a:t>) </a:t>
             </a:r>
             <a:r>
-              <a:rPr lang="sk-SK" dirty="0"/>
+              <a:rPr lang="sk-SK" dirty="0">
+                <a:solidFill>
+                  <a:srgbClr val="C00000"/>
+                </a:solidFill>
+                <a:highlight>
+                  <a:srgbClr val="00FFFF"/>
+                </a:highlight>
+              </a:rPr>
               <a:t>je samostatná jednotka vykonania, ktorá niečo robí</a:t>
             </a:r>
           </a:p>
           <a:p>
             <a:r>
-              <a:rPr lang="sk-SK" dirty="0"/>
+              <a:rPr lang="sk-SK" dirty="0">
+                <a:solidFill>
+                  <a:srgbClr val="C00000"/>
+                </a:solidFill>
+                <a:highlight>
+                  <a:srgbClr val="00FFFF"/>
+                </a:highlight>
+              </a:rPr>
               <a:t>Príkazy nevracajú hodnotu</a:t>
             </a:r>
           </a:p>
